--- a/examples/pm9_delete_csl/delete_csl_merged.pptx
+++ b/examples/pm9_delete_csl/delete_csl_merged.pptx
@@ -774,7 +774,7 @@
     </p:spTree>
     <p:extLst>
       <p:ext uri="{BB962C8B-B14F-4D97-AF65-F5344CB8AC3E}">
-        <p14:creationId xmlns:p14="http://schemas.microsoft.com/office/powerpoint/2010/main" val="1772485183"/>
+        <p14:creationId xmlns:p14="http://schemas.microsoft.com/office/powerpoint/2010/main" val="3427117101"/>
       </p:ext>
     </p:extLst>
   </p:cSld>
@@ -998,7 +998,7 @@
     </p:spTree>
     <p:extLst>
       <p:ext uri="{BB962C8B-B14F-4D97-AF65-F5344CB8AC3E}">
-        <p14:creationId xmlns:p14="http://schemas.microsoft.com/office/powerpoint/2010/main" val="783674134"/>
+        <p14:creationId xmlns:p14="http://schemas.microsoft.com/office/powerpoint/2010/main" val="58384446"/>
       </p:ext>
     </p:extLst>
   </p:cSld>
@@ -1228,7 +1228,7 @@
     </p:spTree>
     <p:extLst>
       <p:ext uri="{BB962C8B-B14F-4D97-AF65-F5344CB8AC3E}">
-        <p14:creationId xmlns:p14="http://schemas.microsoft.com/office/powerpoint/2010/main" val="2405538547"/>
+        <p14:creationId xmlns:p14="http://schemas.microsoft.com/office/powerpoint/2010/main" val="196133149"/>
       </p:ext>
     </p:extLst>
   </p:cSld>
@@ -4550,7 +4550,7 @@
     </p:spTree>
     <p:extLst>
       <p:ext uri="{BB962C8B-B14F-4D97-AF65-F5344CB8AC3E}">
-        <p14:creationId xmlns:p14="http://schemas.microsoft.com/office/powerpoint/2010/main" val="650828244"/>
+        <p14:creationId xmlns:p14="http://schemas.microsoft.com/office/powerpoint/2010/main" val="667476523"/>
       </p:ext>
     </p:extLst>
   </p:cSld>
@@ -6841,7 +6841,7 @@
     </p:spTree>
     <p:extLst>
       <p:ext uri="{BB962C8B-B14F-4D97-AF65-F5344CB8AC3E}">
-        <p14:creationId xmlns:p14="http://schemas.microsoft.com/office/powerpoint/2010/main" val="2142801452"/>
+        <p14:creationId xmlns:p14="http://schemas.microsoft.com/office/powerpoint/2010/main" val="1675951787"/>
       </p:ext>
     </p:extLst>
   </p:cSld>
@@ -7895,7 +7895,7 @@
     </p:spTree>
     <p:extLst>
       <p:ext uri="{BB962C8B-B14F-4D97-AF65-F5344CB8AC3E}">
-        <p14:creationId xmlns:p14="http://schemas.microsoft.com/office/powerpoint/2010/main" val="1533052508"/>
+        <p14:creationId xmlns:p14="http://schemas.microsoft.com/office/powerpoint/2010/main" val="3651776365"/>
       </p:ext>
     </p:extLst>
   </p:cSld>
@@ -8756,7 +8756,7 @@
     </p:spTree>
     <p:extLst>
       <p:ext uri="{BB962C8B-B14F-4D97-AF65-F5344CB8AC3E}">
-        <p14:creationId xmlns:p14="http://schemas.microsoft.com/office/powerpoint/2010/main" val="3306666262"/>
+        <p14:creationId xmlns:p14="http://schemas.microsoft.com/office/powerpoint/2010/main" val="840290251"/>
       </p:ext>
     </p:extLst>
   </p:cSld>
@@ -9075,7 +9075,7 @@
     </p:spTree>
     <p:extLst>
       <p:ext uri="{BB962C8B-B14F-4D97-AF65-F5344CB8AC3E}">
-        <p14:creationId xmlns:p14="http://schemas.microsoft.com/office/powerpoint/2010/main" val="3062444284"/>
+        <p14:creationId xmlns:p14="http://schemas.microsoft.com/office/powerpoint/2010/main" val="2936434990"/>
       </p:ext>
     </p:extLst>
   </p:cSld>
@@ -9405,7 +9405,7 @@
     </p:spTree>
     <p:extLst>
       <p:ext uri="{BB962C8B-B14F-4D97-AF65-F5344CB8AC3E}">
-        <p14:creationId xmlns:p14="http://schemas.microsoft.com/office/powerpoint/2010/main" val="1982028407"/>
+        <p14:creationId xmlns:p14="http://schemas.microsoft.com/office/powerpoint/2010/main" val="2338506729"/>
       </p:ext>
     </p:extLst>
   </p:cSld>
@@ -9735,7 +9735,7 @@
     </p:spTree>
     <p:extLst>
       <p:ext uri="{BB962C8B-B14F-4D97-AF65-F5344CB8AC3E}">
-        <p14:creationId xmlns:p14="http://schemas.microsoft.com/office/powerpoint/2010/main" val="531233465"/>
+        <p14:creationId xmlns:p14="http://schemas.microsoft.com/office/powerpoint/2010/main" val="2256932740"/>
       </p:ext>
     </p:extLst>
   </p:cSld>
@@ -10065,7 +10065,7 @@
     </p:spTree>
     <p:extLst>
       <p:ext uri="{BB962C8B-B14F-4D97-AF65-F5344CB8AC3E}">
-        <p14:creationId xmlns:p14="http://schemas.microsoft.com/office/powerpoint/2010/main" val="3896861762"/>
+        <p14:creationId xmlns:p14="http://schemas.microsoft.com/office/powerpoint/2010/main" val="459526305"/>
       </p:ext>
     </p:extLst>
   </p:cSld>

--- a/examples/pm9_delete_csl/delete_csl_merged.pptx
+++ b/examples/pm9_delete_csl/delete_csl_merged.pptx
@@ -245,7 +245,7 @@
           <a:p>
             <a:fld id="{294670BC-B8C6-44A7-84E1-23632D8FD86F}" type="datetimeFigureOut">
               <a:rPr kumimoji="1" lang="ja-JP" altLang="en-US" smtClean="0"/>
-              <a:t>2026/6/4</a:t>
+              <a:t>2026/6/6</a:t>
             </a:fld>
             <a:endParaRPr kumimoji="1" lang="ja-JP" altLang="en-US"/>
           </a:p>
@@ -774,7 +774,7 @@
     </p:spTree>
     <p:extLst>
       <p:ext uri="{BB962C8B-B14F-4D97-AF65-F5344CB8AC3E}">
-        <p14:creationId xmlns:p14="http://schemas.microsoft.com/office/powerpoint/2010/main" val="3427117101"/>
+        <p14:creationId xmlns:p14="http://schemas.microsoft.com/office/powerpoint/2010/main" val="718789467"/>
       </p:ext>
     </p:extLst>
   </p:cSld>
@@ -998,7 +998,7 @@
     </p:spTree>
     <p:extLst>
       <p:ext uri="{BB962C8B-B14F-4D97-AF65-F5344CB8AC3E}">
-        <p14:creationId xmlns:p14="http://schemas.microsoft.com/office/powerpoint/2010/main" val="58384446"/>
+        <p14:creationId xmlns:p14="http://schemas.microsoft.com/office/powerpoint/2010/main" val="2535672788"/>
       </p:ext>
     </p:extLst>
   </p:cSld>
@@ -1228,7 +1228,7 @@
     </p:spTree>
     <p:extLst>
       <p:ext uri="{BB962C8B-B14F-4D97-AF65-F5344CB8AC3E}">
-        <p14:creationId xmlns:p14="http://schemas.microsoft.com/office/powerpoint/2010/main" val="196133149"/>
+        <p14:creationId xmlns:p14="http://schemas.microsoft.com/office/powerpoint/2010/main" val="1082011644"/>
       </p:ext>
     </p:extLst>
   </p:cSld>
@@ -4550,7 +4550,7 @@
     </p:spTree>
     <p:extLst>
       <p:ext uri="{BB962C8B-B14F-4D97-AF65-F5344CB8AC3E}">
-        <p14:creationId xmlns:p14="http://schemas.microsoft.com/office/powerpoint/2010/main" val="667476523"/>
+        <p14:creationId xmlns:p14="http://schemas.microsoft.com/office/powerpoint/2010/main" val="3767289280"/>
       </p:ext>
     </p:extLst>
   </p:cSld>
@@ -6841,7 +6841,7 @@
     </p:spTree>
     <p:extLst>
       <p:ext uri="{BB962C8B-B14F-4D97-AF65-F5344CB8AC3E}">
-        <p14:creationId xmlns:p14="http://schemas.microsoft.com/office/powerpoint/2010/main" val="1675951787"/>
+        <p14:creationId xmlns:p14="http://schemas.microsoft.com/office/powerpoint/2010/main" val="622511882"/>
       </p:ext>
     </p:extLst>
   </p:cSld>
@@ -7895,7 +7895,7 @@
     </p:spTree>
     <p:extLst>
       <p:ext uri="{BB962C8B-B14F-4D97-AF65-F5344CB8AC3E}">
-        <p14:creationId xmlns:p14="http://schemas.microsoft.com/office/powerpoint/2010/main" val="3651776365"/>
+        <p14:creationId xmlns:p14="http://schemas.microsoft.com/office/powerpoint/2010/main" val="1305218874"/>
       </p:ext>
     </p:extLst>
   </p:cSld>
@@ -8756,7 +8756,7 @@
     </p:spTree>
     <p:extLst>
       <p:ext uri="{BB962C8B-B14F-4D97-AF65-F5344CB8AC3E}">
-        <p14:creationId xmlns:p14="http://schemas.microsoft.com/office/powerpoint/2010/main" val="840290251"/>
+        <p14:creationId xmlns:p14="http://schemas.microsoft.com/office/powerpoint/2010/main" val="2285455994"/>
       </p:ext>
     </p:extLst>
   </p:cSld>
@@ -9075,7 +9075,7 @@
     </p:spTree>
     <p:extLst>
       <p:ext uri="{BB962C8B-B14F-4D97-AF65-F5344CB8AC3E}">
-        <p14:creationId xmlns:p14="http://schemas.microsoft.com/office/powerpoint/2010/main" val="2936434990"/>
+        <p14:creationId xmlns:p14="http://schemas.microsoft.com/office/powerpoint/2010/main" val="400383006"/>
       </p:ext>
     </p:extLst>
   </p:cSld>
@@ -9405,7 +9405,7 @@
     </p:spTree>
     <p:extLst>
       <p:ext uri="{BB962C8B-B14F-4D97-AF65-F5344CB8AC3E}">
-        <p14:creationId xmlns:p14="http://schemas.microsoft.com/office/powerpoint/2010/main" val="2338506729"/>
+        <p14:creationId xmlns:p14="http://schemas.microsoft.com/office/powerpoint/2010/main" val="3717680769"/>
       </p:ext>
     </p:extLst>
   </p:cSld>
@@ -9735,7 +9735,7 @@
     </p:spTree>
     <p:extLst>
       <p:ext uri="{BB962C8B-B14F-4D97-AF65-F5344CB8AC3E}">
-        <p14:creationId xmlns:p14="http://schemas.microsoft.com/office/powerpoint/2010/main" val="2256932740"/>
+        <p14:creationId xmlns:p14="http://schemas.microsoft.com/office/powerpoint/2010/main" val="4197568810"/>
       </p:ext>
     </p:extLst>
   </p:cSld>
@@ -10065,7 +10065,7 @@
     </p:spTree>
     <p:extLst>
       <p:ext uri="{BB962C8B-B14F-4D97-AF65-F5344CB8AC3E}">
-        <p14:creationId xmlns:p14="http://schemas.microsoft.com/office/powerpoint/2010/main" val="459526305"/>
+        <p14:creationId xmlns:p14="http://schemas.microsoft.com/office/powerpoint/2010/main" val="1501617275"/>
       </p:ext>
     </p:extLst>
   </p:cSld>
